--- a/assets/powerpoints/module-n1-inscription/C2-dire-un-numero-un-code-un-courriel.pptx
+++ b/assets/powerpoints/module-n1-inscription/C2-dire-un-numero-un-code-un-courriel.pptx
@@ -9151,7 +9151,25 @@
                 </a:solidFill>
                 <a:latin typeface="Verdana"/>
               </a:rPr>
-              <a:t>Le numéro de téléphone a &lt;b&gt;dix chiffres&lt;/b&gt; en trois groupes. Les trois premiers sont l'indicatif de la région : 514 et 438 à Montréal, 450 autour, 418 à Québec. En France on regroupe les chiffres deux par deux ; ici, un par un, toujours.</a:t>
+              <a:t>Le numéro de téléphone a </a:t>
+            </a:r>
+            <a:r>
+              <a:rPr sz="2000" b="1" i="0">
+                <a:solidFill>
+                  <a:srgbClr val="4B4F52"/>
+                </a:solidFill>
+                <a:latin typeface="Verdana"/>
+              </a:rPr>
+              <a:t>dix chiffres</a:t>
+            </a:r>
+            <a:r>
+              <a:rPr sz="2000" b="0" i="0">
+                <a:solidFill>
+                  <a:srgbClr val="4B4F52"/>
+                </a:solidFill>
+                <a:latin typeface="Verdana"/>
+              </a:rPr>
+              <a:t> en trois groupes. Les trois premiers sont l'indicatif de la région : 514 et 438 à Montréal, 450 autour, 418 à Québec. En France on regroupe les chiffres deux par deux ; ici, un par un, toujours.</a:t>
             </a:r>
           </a:p>
         </p:txBody>
